--- a/CalendarioAgo26/presentaciones/18_Expresiones_regularesF.pptx
+++ b/CalendarioAgo26/presentaciones/18_Expresiones_regularesF.pptx
@@ -226,6 +226,43 @@
 </p:presentation>
 </file>
 
+<file path=ppt/revisionInfo.xml><?xml version="1.0" encoding="utf-8"?>
+<p1510:revInfo xmlns:a="http://schemas.openxmlformats.org/drawingml/2006/main" xmlns:r="http://schemas.openxmlformats.org/officeDocument/2006/relationships" xmlns:p1510="http://schemas.microsoft.com/office/powerpoint/2015/10/main">
+  <p1510:revLst>
+    <p1510:client id="{BC46C517-FB43-4D80-B2A9-36495283D94B}" v="1" dt="2026-08-11T16:32:39.378"/>
+  </p1510:revLst>
+</p1510:revInfo>
+</file>
+
+<file path=ppt/changesInfos/changesInfo1.xml><?xml version="1.0" encoding="utf-8"?>
+<pc:chgInfo xmlns:a="http://schemas.openxmlformats.org/drawingml/2006/main" xmlns:r="http://schemas.openxmlformats.org/officeDocument/2006/relationships" xmlns:ac="http://schemas.microsoft.com/office/drawing/2013/main/command" xmlns:pc="http://schemas.microsoft.com/office/powerpoint/2013/main/command">
+  <pc:docChgLst>
+    <pc:chgData name="Lizethe Pérez Fuertes" userId="4ae9ef87-2a7d-42f8-8dfa-0a501a9e2ff4" providerId="ADAL" clId="{FDDD45CB-1330-4033-A842-3D2746AFF7C7}"/>
+    <pc:docChg chg="modSld">
+      <pc:chgData name="Lizethe Pérez Fuertes" userId="4ae9ef87-2a7d-42f8-8dfa-0a501a9e2ff4" providerId="ADAL" clId="{FDDD45CB-1330-4033-A842-3D2746AFF7C7}" dt="2026-08-11T16:32:39.378" v="0"/>
+      <pc:docMkLst>
+        <pc:docMk/>
+      </pc:docMkLst>
+      <pc:sldChg chg="modSp">
+        <pc:chgData name="Lizethe Pérez Fuertes" userId="4ae9ef87-2a7d-42f8-8dfa-0a501a9e2ff4" providerId="ADAL" clId="{FDDD45CB-1330-4033-A842-3D2746AFF7C7}" dt="2026-08-11T16:32:39.378" v="0"/>
+        <pc:sldMkLst>
+          <pc:docMk/>
+          <pc:sldMk cId="542782376" sldId="293"/>
+        </pc:sldMkLst>
+        <pc:spChg chg="mod">
+          <ac:chgData name="Lizethe Pérez Fuertes" userId="4ae9ef87-2a7d-42f8-8dfa-0a501a9e2ff4" providerId="ADAL" clId="{FDDD45CB-1330-4033-A842-3D2746AFF7C7}" dt="2026-08-11T16:32:39.378" v="0"/>
+          <ac:spMkLst>
+            <pc:docMk/>
+            <pc:sldMk cId="542782376" sldId="293"/>
+            <ac:spMk id="2" creationId="{00000000-0000-0000-0000-000000000000}"/>
+          </ac:spMkLst>
+        </pc:spChg>
+      </pc:sldChg>
+    </pc:docChg>
+  </pc:docChgLst>
+</pc:chgInfo>
+</file>
+
 <file path=ppt/notesMasters/notesMaster1.xml><?xml version="1.0" encoding="utf-8"?>
 <p:notesMaster xmlns:a="http://schemas.openxmlformats.org/drawingml/2006/main" xmlns:r="http://schemas.openxmlformats.org/officeDocument/2006/relationships" xmlns:p="http://schemas.openxmlformats.org/presentationml/2006/main">
   <p:cSld>
@@ -308,7 +345,7 @@
           <a:p>
             <a:fld id="{DDE721D5-655F-45D2-B717-3C4CD78C8568}" type="datetimeFigureOut">
               <a:rPr lang="es-MX" smtClean="0"/>
-              <a:t>31/08/2022</a:t>
+              <a:t>11/08/2026</a:t>
             </a:fld>
             <a:endParaRPr lang="es-MX" dirty="0"/>
           </a:p>
@@ -8989,7 +9026,7 @@
           <a:p>
             <a:fld id="{B3F3E716-CACC-4490-AD07-F24B6A68DE47}" type="datetimeFigureOut">
               <a:rPr lang="es-MX" smtClean="0"/>
-              <a:t>31/08/2022</a:t>
+              <a:t>11/08/2026</a:t>
             </a:fld>
             <a:endParaRPr lang="es-MX" dirty="0"/>
           </a:p>
@@ -9159,7 +9196,7 @@
           <a:p>
             <a:fld id="{B3F3E716-CACC-4490-AD07-F24B6A68DE47}" type="datetimeFigureOut">
               <a:rPr lang="es-MX" smtClean="0"/>
-              <a:t>31/08/2022</a:t>
+              <a:t>11/08/2026</a:t>
             </a:fld>
             <a:endParaRPr lang="es-MX" dirty="0"/>
           </a:p>
@@ -9339,7 +9376,7 @@
           <a:p>
             <a:fld id="{B3F3E716-CACC-4490-AD07-F24B6A68DE47}" type="datetimeFigureOut">
               <a:rPr lang="es-MX" smtClean="0"/>
-              <a:t>31/08/2022</a:t>
+              <a:t>11/08/2026</a:t>
             </a:fld>
             <a:endParaRPr lang="es-MX" dirty="0"/>
           </a:p>
@@ -9492,7 +9529,7 @@
           <a:p>
             <a:fld id="{1D8BD707-D9CF-40AE-B4C6-C98DA3205C09}" type="datetimeFigureOut">
               <a:rPr lang="en-US" smtClean="0"/>
-              <a:t>8/31/2022</a:t>
+              <a:t>8/11/2026</a:t>
             </a:fld>
             <a:endParaRPr lang="en-US" dirty="0"/>
           </a:p>
@@ -9652,7 +9689,7 @@
           <a:p>
             <a:fld id="{B3F3E716-CACC-4490-AD07-F24B6A68DE47}" type="datetimeFigureOut">
               <a:rPr lang="es-MX" smtClean="0"/>
-              <a:t>31/08/2022</a:t>
+              <a:t>11/08/2026</a:t>
             </a:fld>
             <a:endParaRPr lang="es-MX" dirty="0"/>
           </a:p>
@@ -9898,7 +9935,7 @@
           <a:p>
             <a:fld id="{B3F3E716-CACC-4490-AD07-F24B6A68DE47}" type="datetimeFigureOut">
               <a:rPr lang="es-MX" smtClean="0"/>
-              <a:t>31/08/2022</a:t>
+              <a:t>11/08/2026</a:t>
             </a:fld>
             <a:endParaRPr lang="es-MX" dirty="0"/>
           </a:p>
@@ -10186,7 +10223,7 @@
           <a:p>
             <a:fld id="{B3F3E716-CACC-4490-AD07-F24B6A68DE47}" type="datetimeFigureOut">
               <a:rPr lang="es-MX" smtClean="0"/>
-              <a:t>31/08/2022</a:t>
+              <a:t>11/08/2026</a:t>
             </a:fld>
             <a:endParaRPr lang="es-MX" dirty="0"/>
           </a:p>
@@ -10608,7 +10645,7 @@
           <a:p>
             <a:fld id="{B3F3E716-CACC-4490-AD07-F24B6A68DE47}" type="datetimeFigureOut">
               <a:rPr lang="es-MX" smtClean="0"/>
-              <a:t>31/08/2022</a:t>
+              <a:t>11/08/2026</a:t>
             </a:fld>
             <a:endParaRPr lang="es-MX" dirty="0"/>
           </a:p>
@@ -10726,7 +10763,7 @@
           <a:p>
             <a:fld id="{B3F3E716-CACC-4490-AD07-F24B6A68DE47}" type="datetimeFigureOut">
               <a:rPr lang="es-MX" smtClean="0"/>
-              <a:t>31/08/2022</a:t>
+              <a:t>11/08/2026</a:t>
             </a:fld>
             <a:endParaRPr lang="es-MX" dirty="0"/>
           </a:p>
@@ -10821,7 +10858,7 @@
           <a:p>
             <a:fld id="{B3F3E716-CACC-4490-AD07-F24B6A68DE47}" type="datetimeFigureOut">
               <a:rPr lang="es-MX" smtClean="0"/>
-              <a:t>31/08/2022</a:t>
+              <a:t>11/08/2026</a:t>
             </a:fld>
             <a:endParaRPr lang="es-MX" dirty="0"/>
           </a:p>
@@ -11098,7 +11135,7 @@
           <a:p>
             <a:fld id="{B3F3E716-CACC-4490-AD07-F24B6A68DE47}" type="datetimeFigureOut">
               <a:rPr lang="es-MX" smtClean="0"/>
-              <a:t>31/08/2022</a:t>
+              <a:t>11/08/2026</a:t>
             </a:fld>
             <a:endParaRPr lang="es-MX" dirty="0"/>
           </a:p>
@@ -11351,7 +11388,7 @@
           <a:p>
             <a:fld id="{B3F3E716-CACC-4490-AD07-F24B6A68DE47}" type="datetimeFigureOut">
               <a:rPr lang="es-MX" smtClean="0"/>
-              <a:t>31/08/2022</a:t>
+              <a:t>11/08/2026</a:t>
             </a:fld>
             <a:endParaRPr lang="es-MX" dirty="0"/>
           </a:p>
@@ -11564,7 +11601,7 @@
           <a:p>
             <a:fld id="{B3F3E716-CACC-4490-AD07-F24B6A68DE47}" type="datetimeFigureOut">
               <a:rPr lang="es-MX" smtClean="0"/>
-              <a:t>31/08/2022</a:t>
+              <a:t>11/08/2026</a:t>
             </a:fld>
             <a:endParaRPr lang="es-MX" dirty="0"/>
           </a:p>
@@ -11962,21 +11999,18 @@
           </a:bodyPr>
           <a:lstStyle/>
           <a:p>
-            <a:pPr algn="l" eaLnBrk="1" fontAlgn="auto" hangingPunct="1">
-              <a:spcAft>
-                <a:spcPts val="0"/>
-              </a:spcAft>
+            <a:pPr algn="l">
               <a:defRPr/>
             </a:pPr>
             <a:r>
-              <a:rPr lang="es-MX" sz="3200" dirty="0">
+              <a:rPr lang="es-MX" sz="3200">
                 <a:solidFill>
                   <a:schemeClr val="bg2">
                     <a:lumMod val="50000"/>
                   </a:schemeClr>
                 </a:solidFill>
               </a:rPr>
-              <a:t>TI 3001 C</a:t>
+              <a:t>TI 3008 C</a:t>
             </a:r>
             <a:br>
               <a:rPr lang="es-MX" sz="3200" dirty="0">
